--- a/Examples/GroupDocs.Assembly.Examples.Java/Data/Output/Presentation Reports/out.pptx
+++ b/Examples/GroupDocs.Assembly.Examples.Java/Data/Output/Presentation Reports/out.pptx
@@ -1,19 +1,17 @@
 
 <file path=ppt/presentation.xml><?xml version="1.0" encoding="utf-8"?>
-<!--Generated by Aspose.Slides for Java 16.5.0.0-->
+<!--Generated by Aspose.Slides for Java 26.2-->
 <p:presentation xmlns:r="http://schemas.openxmlformats.org/officeDocument/2006/relationships" xmlns:a="http://schemas.openxmlformats.org/drawingml/2006/main" xmlns:p="http://schemas.openxmlformats.org/presentationml/2006/main" saveSubsetFonts="1">
   <p:sldMasterIdLst>
     <p:sldMasterId id="2147483648" r:id="rId1"/>
   </p:sldMasterIdLst>
   <p:sldIdLst>
     <p:sldId id="257" r:id="rId2"/>
-    <p:sldId id="258" r:id="rId3"/>
-    <p:sldId id="259" r:id="rId4"/>
   </p:sldIdLst>
   <p:sldSz cx="12192000" cy="6858000"/>
   <p:notesSz cx="6858000" cy="9144000"/>
   <p:custDataLst>
-    <p:tags r:id="rId5"/>
+    <p:tags r:id="rId3"/>
   </p:custDataLst>
   <p:defaultTextStyle>
     <a:defPPr>
@@ -110,16 +108,12 @@
       </a:defRPr>
     </a:lvl9pPr>
   </p:defaultTextStyle>
-  <p:extLst>
-    <p:ext uri="{EFAFB233-063F-42B5-8137-9DF3F51BA10A}">
-      <p15:sldGuideLst xmlns:p15="http://schemas.microsoft.com/office/powerpoint/2012/main"/>
-    </p:ext>
-  </p:extLst>
+  <p:extLst/>
 </p:presentation>
 </file>
 
 <file path=ppt/slideLayouts/slideLayout1.xml><?xml version="1.0" encoding="utf-8"?>
-<p:sldLayout xmlns:a="http://schemas.openxmlformats.org/drawingml/2006/main" xmlns:r="http://schemas.openxmlformats.org/officeDocument/2006/relationships" xmlns:p14="http://schemas.microsoft.com/office/powerpoint/2010/main" xmlns:p15="http://schemas.microsoft.com/office/powerpoint/2012/main" xmlns:p="http://schemas.openxmlformats.org/presentationml/2006/main" type="title" preserve="1">
+<p:sldLayout xmlns:a="http://schemas.openxmlformats.org/drawingml/2006/main" xmlns:r="http://schemas.openxmlformats.org/officeDocument/2006/relationships" xmlns:m="http://schemas.openxmlformats.org/officeDocument/2006/math" xmlns:w="http://schemas.openxmlformats.org/wordprocessingml/2006/main" xmlns:wp="http://schemas.openxmlformats.org/drawingml/2006/wordprocessingDrawing" xmlns:a14="http://schemas.microsoft.com/office/drawing/2010/main" xmlns:mc="http://schemas.openxmlformats.org/markup-compatibility/2006" xmlns:p14="http://schemas.microsoft.com/office/powerpoint/2010/main" xmlns:p15="http://schemas.microsoft.com/office/powerpoint/2012/main" xmlns:p159="http://schemas.microsoft.com/office/powerpoint/2015/09/main" xmlns:p="http://schemas.openxmlformats.org/presentationml/2006/main" type="title" preserve="1">
   <p:cSld name="Title Slide">
     <p:spTree>
       <p:nvGrpSpPr>
@@ -245,7 +239,7 @@
           <a:bodyPr/>
           <a:lstStyle/>
           <a:p>
-            <a:fld id="{56F66129-919E-492C-8A1B-F160C0207E30}" type="datetimeFigureOut">
+            <a:fld id="{F0DD9599-8BD2-4B3B-8219-CDC739818FEC}" type="datetimeFigureOut">
               <a:rPr lang="ru-RU" smtClean="0"/>
               <a:t>31.01.2017</a:t>
             </a:fld>
@@ -287,7 +281,7 @@
           <a:bodyPr/>
           <a:lstStyle/>
           <a:p>
-            <a:fld id="{AE5BA9BA-2214-46E9-AFA9-6DBBD522CB90}" type="slidenum">
+            <a:fld id="{85BAAAE6-A6EB-49A1-9055-EDD80F287142}" type="slidenum">
               <a:rPr lang="ru-RU" smtClean="0"/>
               <a:t>‹#›</a:t>
             </a:fld>
@@ -298,7 +292,7 @@
     </p:spTree>
     <p:extLst>
       <p:ext uri="{BB962C8B-B14F-4D97-AF65-F5344CB8AC3E}">
-        <p14:creationId xmlns:p14="http://schemas.microsoft.com/office/powerpoint/2010/main" val="412714027"/>
+        <p14:creationId val="2442195806"/>
       </p:ext>
     </p:extLst>
   </p:cSld>
@@ -311,7 +305,7 @@
 </file>
 
 <file path=ppt/slideLayouts/slideLayout10.xml><?xml version="1.0" encoding="utf-8"?>
-<p:sldLayout xmlns:a="http://schemas.openxmlformats.org/drawingml/2006/main" xmlns:r="http://schemas.openxmlformats.org/officeDocument/2006/relationships" xmlns:p14="http://schemas.microsoft.com/office/powerpoint/2010/main" xmlns:p15="http://schemas.microsoft.com/office/powerpoint/2012/main" xmlns:p="http://schemas.openxmlformats.org/presentationml/2006/main" type="vertTx" preserve="1">
+<p:sldLayout xmlns:a="http://schemas.openxmlformats.org/drawingml/2006/main" xmlns:r="http://schemas.openxmlformats.org/officeDocument/2006/relationships" xmlns:m="http://schemas.openxmlformats.org/officeDocument/2006/math" xmlns:w="http://schemas.openxmlformats.org/wordprocessingml/2006/main" xmlns:wp="http://schemas.openxmlformats.org/drawingml/2006/wordprocessingDrawing" xmlns:a14="http://schemas.microsoft.com/office/drawing/2010/main" xmlns:mc="http://schemas.openxmlformats.org/markup-compatibility/2006" xmlns:p14="http://schemas.microsoft.com/office/powerpoint/2010/main" xmlns:p15="http://schemas.microsoft.com/office/powerpoint/2012/main" xmlns:p159="http://schemas.microsoft.com/office/powerpoint/2015/09/main" xmlns:p="http://schemas.openxmlformats.org/presentationml/2006/main" type="vertTx" preserve="1">
   <p:cSld name="Title and Vertical Text">
     <p:spTree>
       <p:nvGrpSpPr>
@@ -415,7 +409,7 @@
           <a:bodyPr/>
           <a:lstStyle/>
           <a:p>
-            <a:fld id="{56F66129-919E-492C-8A1B-F160C0207E30}" type="datetimeFigureOut">
+            <a:fld id="{F0DD9599-8BD2-4B3B-8219-CDC739818FEC}" type="datetimeFigureOut">
               <a:rPr lang="ru-RU" smtClean="0"/>
               <a:t>31.01.2017</a:t>
             </a:fld>
@@ -457,7 +451,7 @@
           <a:bodyPr/>
           <a:lstStyle/>
           <a:p>
-            <a:fld id="{AE5BA9BA-2214-46E9-AFA9-6DBBD522CB90}" type="slidenum">
+            <a:fld id="{85BAAAE6-A6EB-49A1-9055-EDD80F287142}" type="slidenum">
               <a:rPr lang="ru-RU" smtClean="0"/>
               <a:t>‹#›</a:t>
             </a:fld>
@@ -468,7 +462,7 @@
     </p:spTree>
     <p:extLst>
       <p:ext uri="{BB962C8B-B14F-4D97-AF65-F5344CB8AC3E}">
-        <p14:creationId xmlns:p14="http://schemas.microsoft.com/office/powerpoint/2010/main" val="3609513184"/>
+        <p14:creationId val="2069683524"/>
       </p:ext>
     </p:extLst>
   </p:cSld>
@@ -481,7 +475,7 @@
 </file>
 
 <file path=ppt/slideLayouts/slideLayout11.xml><?xml version="1.0" encoding="utf-8"?>
-<p:sldLayout xmlns:a="http://schemas.openxmlformats.org/drawingml/2006/main" xmlns:r="http://schemas.openxmlformats.org/officeDocument/2006/relationships" xmlns:p14="http://schemas.microsoft.com/office/powerpoint/2010/main" xmlns:p15="http://schemas.microsoft.com/office/powerpoint/2012/main" xmlns:p="http://schemas.openxmlformats.org/presentationml/2006/main" type="vertTitleAndTx" preserve="1">
+<p:sldLayout xmlns:a="http://schemas.openxmlformats.org/drawingml/2006/main" xmlns:r="http://schemas.openxmlformats.org/officeDocument/2006/relationships" xmlns:m="http://schemas.openxmlformats.org/officeDocument/2006/math" xmlns:w="http://schemas.openxmlformats.org/wordprocessingml/2006/main" xmlns:wp="http://schemas.openxmlformats.org/drawingml/2006/wordprocessingDrawing" xmlns:a14="http://schemas.microsoft.com/office/drawing/2010/main" xmlns:mc="http://schemas.openxmlformats.org/markup-compatibility/2006" xmlns:p14="http://schemas.microsoft.com/office/powerpoint/2010/main" xmlns:p15="http://schemas.microsoft.com/office/powerpoint/2012/main" xmlns:p159="http://schemas.microsoft.com/office/powerpoint/2015/09/main" xmlns:p="http://schemas.openxmlformats.org/presentationml/2006/main" type="vertTitleAndTx" preserve="1">
   <p:cSld name="Vertical Title and Text">
     <p:spTree>
       <p:nvGrpSpPr>
@@ -595,7 +589,7 @@
           <a:bodyPr/>
           <a:lstStyle/>
           <a:p>
-            <a:fld id="{56F66129-919E-492C-8A1B-F160C0207E30}" type="datetimeFigureOut">
+            <a:fld id="{F0DD9599-8BD2-4B3B-8219-CDC739818FEC}" type="datetimeFigureOut">
               <a:rPr lang="ru-RU" smtClean="0"/>
               <a:t>31.01.2017</a:t>
             </a:fld>
@@ -637,7 +631,7 @@
           <a:bodyPr/>
           <a:lstStyle/>
           <a:p>
-            <a:fld id="{AE5BA9BA-2214-46E9-AFA9-6DBBD522CB90}" type="slidenum">
+            <a:fld id="{85BAAAE6-A6EB-49A1-9055-EDD80F287142}" type="slidenum">
               <a:rPr lang="ru-RU" smtClean="0"/>
               <a:t>‹#›</a:t>
             </a:fld>
@@ -648,7 +642,7 @@
     </p:spTree>
     <p:extLst>
       <p:ext uri="{BB962C8B-B14F-4D97-AF65-F5344CB8AC3E}">
-        <p14:creationId xmlns:p14="http://schemas.microsoft.com/office/powerpoint/2010/main" val="3292951286"/>
+        <p14:creationId val="3803972330"/>
       </p:ext>
     </p:extLst>
   </p:cSld>
@@ -661,7 +655,7 @@
 </file>
 
 <file path=ppt/slideLayouts/slideLayout2.xml><?xml version="1.0" encoding="utf-8"?>
-<p:sldLayout xmlns:a="http://schemas.openxmlformats.org/drawingml/2006/main" xmlns:r="http://schemas.openxmlformats.org/officeDocument/2006/relationships" xmlns:p14="http://schemas.microsoft.com/office/powerpoint/2010/main" xmlns:p15="http://schemas.microsoft.com/office/powerpoint/2012/main" xmlns:p="http://schemas.openxmlformats.org/presentationml/2006/main" type="obj" preserve="1">
+<p:sldLayout xmlns:a="http://schemas.openxmlformats.org/drawingml/2006/main" xmlns:r="http://schemas.openxmlformats.org/officeDocument/2006/relationships" xmlns:m="http://schemas.openxmlformats.org/officeDocument/2006/math" xmlns:w="http://schemas.openxmlformats.org/wordprocessingml/2006/main" xmlns:wp="http://schemas.openxmlformats.org/drawingml/2006/wordprocessingDrawing" xmlns:a14="http://schemas.microsoft.com/office/drawing/2010/main" xmlns:mc="http://schemas.openxmlformats.org/markup-compatibility/2006" xmlns:p14="http://schemas.microsoft.com/office/powerpoint/2010/main" xmlns:p15="http://schemas.microsoft.com/office/powerpoint/2012/main" xmlns:p159="http://schemas.microsoft.com/office/powerpoint/2015/09/main" xmlns:p="http://schemas.openxmlformats.org/presentationml/2006/main" type="obj" preserve="1">
   <p:cSld name="Title and Content">
     <p:spTree>
       <p:nvGrpSpPr>
@@ -765,7 +759,7 @@
           <a:bodyPr/>
           <a:lstStyle/>
           <a:p>
-            <a:fld id="{56F66129-919E-492C-8A1B-F160C0207E30}" type="datetimeFigureOut">
+            <a:fld id="{F0DD9599-8BD2-4B3B-8219-CDC739818FEC}" type="datetimeFigureOut">
               <a:rPr lang="ru-RU" smtClean="0"/>
               <a:t>31.01.2017</a:t>
             </a:fld>
@@ -807,7 +801,7 @@
           <a:bodyPr/>
           <a:lstStyle/>
           <a:p>
-            <a:fld id="{AE5BA9BA-2214-46E9-AFA9-6DBBD522CB90}" type="slidenum">
+            <a:fld id="{85BAAAE6-A6EB-49A1-9055-EDD80F287142}" type="slidenum">
               <a:rPr lang="ru-RU" smtClean="0"/>
               <a:t>‹#›</a:t>
             </a:fld>
@@ -818,7 +812,7 @@
     </p:spTree>
     <p:extLst>
       <p:ext uri="{BB962C8B-B14F-4D97-AF65-F5344CB8AC3E}">
-        <p14:creationId xmlns:p14="http://schemas.microsoft.com/office/powerpoint/2010/main" val="1308402175"/>
+        <p14:creationId val="3429261291"/>
       </p:ext>
     </p:extLst>
   </p:cSld>
@@ -831,7 +825,7 @@
 </file>
 
 <file path=ppt/slideLayouts/slideLayout3.xml><?xml version="1.0" encoding="utf-8"?>
-<p:sldLayout xmlns:a="http://schemas.openxmlformats.org/drawingml/2006/main" xmlns:r="http://schemas.openxmlformats.org/officeDocument/2006/relationships" xmlns:p14="http://schemas.microsoft.com/office/powerpoint/2010/main" xmlns:p15="http://schemas.microsoft.com/office/powerpoint/2012/main" xmlns:p="http://schemas.openxmlformats.org/presentationml/2006/main" type="secHead" preserve="1">
+<p:sldLayout xmlns:a="http://schemas.openxmlformats.org/drawingml/2006/main" xmlns:r="http://schemas.openxmlformats.org/officeDocument/2006/relationships" xmlns:m="http://schemas.openxmlformats.org/officeDocument/2006/math" xmlns:w="http://schemas.openxmlformats.org/wordprocessingml/2006/main" xmlns:wp="http://schemas.openxmlformats.org/drawingml/2006/wordprocessingDrawing" xmlns:a14="http://schemas.microsoft.com/office/drawing/2010/main" xmlns:mc="http://schemas.openxmlformats.org/markup-compatibility/2006" xmlns:p14="http://schemas.microsoft.com/office/powerpoint/2010/main" xmlns:p15="http://schemas.microsoft.com/office/powerpoint/2012/main" xmlns:p159="http://schemas.microsoft.com/office/powerpoint/2015/09/main" xmlns:p="http://schemas.openxmlformats.org/presentationml/2006/main" type="secHead" preserve="1">
   <p:cSld name="Section Header">
     <p:spTree>
       <p:nvGrpSpPr>
@@ -1011,7 +1005,7 @@
           <a:bodyPr/>
           <a:lstStyle/>
           <a:p>
-            <a:fld id="{56F66129-919E-492C-8A1B-F160C0207E30}" type="datetimeFigureOut">
+            <a:fld id="{F0DD9599-8BD2-4B3B-8219-CDC739818FEC}" type="datetimeFigureOut">
               <a:rPr lang="ru-RU" smtClean="0"/>
               <a:t>31.01.2017</a:t>
             </a:fld>
@@ -1053,7 +1047,7 @@
           <a:bodyPr/>
           <a:lstStyle/>
           <a:p>
-            <a:fld id="{AE5BA9BA-2214-46E9-AFA9-6DBBD522CB90}" type="slidenum">
+            <a:fld id="{85BAAAE6-A6EB-49A1-9055-EDD80F287142}" type="slidenum">
               <a:rPr lang="ru-RU" smtClean="0"/>
               <a:t>‹#›</a:t>
             </a:fld>
@@ -1064,7 +1058,7 @@
     </p:spTree>
     <p:extLst>
       <p:ext uri="{BB962C8B-B14F-4D97-AF65-F5344CB8AC3E}">
-        <p14:creationId xmlns:p14="http://schemas.microsoft.com/office/powerpoint/2010/main" val="3449766676"/>
+        <p14:creationId val="4259052402"/>
       </p:ext>
     </p:extLst>
   </p:cSld>
@@ -1077,7 +1071,7 @@
 </file>
 
 <file path=ppt/slideLayouts/slideLayout4.xml><?xml version="1.0" encoding="utf-8"?>
-<p:sldLayout xmlns:a="http://schemas.openxmlformats.org/drawingml/2006/main" xmlns:r="http://schemas.openxmlformats.org/officeDocument/2006/relationships" xmlns:p14="http://schemas.microsoft.com/office/powerpoint/2010/main" xmlns:p15="http://schemas.microsoft.com/office/powerpoint/2012/main" xmlns:p="http://schemas.openxmlformats.org/presentationml/2006/main" type="twoObj" preserve="1">
+<p:sldLayout xmlns:a="http://schemas.openxmlformats.org/drawingml/2006/main" xmlns:r="http://schemas.openxmlformats.org/officeDocument/2006/relationships" xmlns:m="http://schemas.openxmlformats.org/officeDocument/2006/math" xmlns:w="http://schemas.openxmlformats.org/wordprocessingml/2006/main" xmlns:wp="http://schemas.openxmlformats.org/drawingml/2006/wordprocessingDrawing" xmlns:a14="http://schemas.microsoft.com/office/drawing/2010/main" xmlns:mc="http://schemas.openxmlformats.org/markup-compatibility/2006" xmlns:p14="http://schemas.microsoft.com/office/powerpoint/2010/main" xmlns:p15="http://schemas.microsoft.com/office/powerpoint/2012/main" xmlns:p159="http://schemas.microsoft.com/office/powerpoint/2015/09/main" xmlns:p="http://schemas.openxmlformats.org/presentationml/2006/main" type="twoObj" preserve="1">
   <p:cSld name="Two Content">
     <p:spTree>
       <p:nvGrpSpPr>
@@ -1243,7 +1237,7 @@
           <a:bodyPr/>
           <a:lstStyle/>
           <a:p>
-            <a:fld id="{56F66129-919E-492C-8A1B-F160C0207E30}" type="datetimeFigureOut">
+            <a:fld id="{F0DD9599-8BD2-4B3B-8219-CDC739818FEC}" type="datetimeFigureOut">
               <a:rPr lang="ru-RU" smtClean="0"/>
               <a:t>31.01.2017</a:t>
             </a:fld>
@@ -1285,7 +1279,7 @@
           <a:bodyPr/>
           <a:lstStyle/>
           <a:p>
-            <a:fld id="{AE5BA9BA-2214-46E9-AFA9-6DBBD522CB90}" type="slidenum">
+            <a:fld id="{85BAAAE6-A6EB-49A1-9055-EDD80F287142}" type="slidenum">
               <a:rPr lang="ru-RU" smtClean="0"/>
               <a:t>‹#›</a:t>
             </a:fld>
@@ -1296,7 +1290,7 @@
     </p:spTree>
     <p:extLst>
       <p:ext uri="{BB962C8B-B14F-4D97-AF65-F5344CB8AC3E}">
-        <p14:creationId xmlns:p14="http://schemas.microsoft.com/office/powerpoint/2010/main" val="2319896305"/>
+        <p14:creationId val="2227444474"/>
       </p:ext>
     </p:extLst>
   </p:cSld>
@@ -1309,7 +1303,7 @@
 </file>
 
 <file path=ppt/slideLayouts/slideLayout5.xml><?xml version="1.0" encoding="utf-8"?>
-<p:sldLayout xmlns:a="http://schemas.openxmlformats.org/drawingml/2006/main" xmlns:r="http://schemas.openxmlformats.org/officeDocument/2006/relationships" xmlns:p14="http://schemas.microsoft.com/office/powerpoint/2010/main" xmlns:p15="http://schemas.microsoft.com/office/powerpoint/2012/main" xmlns:p="http://schemas.openxmlformats.org/presentationml/2006/main" type="twoTxTwoObj" preserve="1">
+<p:sldLayout xmlns:a="http://schemas.openxmlformats.org/drawingml/2006/main" xmlns:r="http://schemas.openxmlformats.org/officeDocument/2006/relationships" xmlns:m="http://schemas.openxmlformats.org/officeDocument/2006/math" xmlns:w="http://schemas.openxmlformats.org/wordprocessingml/2006/main" xmlns:wp="http://schemas.openxmlformats.org/drawingml/2006/wordprocessingDrawing" xmlns:a14="http://schemas.microsoft.com/office/drawing/2010/main" xmlns:mc="http://schemas.openxmlformats.org/markup-compatibility/2006" xmlns:p14="http://schemas.microsoft.com/office/powerpoint/2010/main" xmlns:p15="http://schemas.microsoft.com/office/powerpoint/2012/main" xmlns:p159="http://schemas.microsoft.com/office/powerpoint/2015/09/main" xmlns:p="http://schemas.openxmlformats.org/presentationml/2006/main" type="twoTxTwoObj" preserve="1">
   <p:cSld name="Comparison">
     <p:spTree>
       <p:nvGrpSpPr>
@@ -1610,7 +1604,7 @@
           <a:bodyPr/>
           <a:lstStyle/>
           <a:p>
-            <a:fld id="{56F66129-919E-492C-8A1B-F160C0207E30}" type="datetimeFigureOut">
+            <a:fld id="{F0DD9599-8BD2-4B3B-8219-CDC739818FEC}" type="datetimeFigureOut">
               <a:rPr lang="ru-RU" smtClean="0"/>
               <a:t>31.01.2017</a:t>
             </a:fld>
@@ -1652,7 +1646,7 @@
           <a:bodyPr/>
           <a:lstStyle/>
           <a:p>
-            <a:fld id="{AE5BA9BA-2214-46E9-AFA9-6DBBD522CB90}" type="slidenum">
+            <a:fld id="{85BAAAE6-A6EB-49A1-9055-EDD80F287142}" type="slidenum">
               <a:rPr lang="ru-RU" smtClean="0"/>
               <a:t>‹#›</a:t>
             </a:fld>
@@ -1663,7 +1657,7 @@
     </p:spTree>
     <p:extLst>
       <p:ext uri="{BB962C8B-B14F-4D97-AF65-F5344CB8AC3E}">
-        <p14:creationId xmlns:p14="http://schemas.microsoft.com/office/powerpoint/2010/main" val="980928067"/>
+        <p14:creationId val="3733394388"/>
       </p:ext>
     </p:extLst>
   </p:cSld>
@@ -1676,7 +1670,7 @@
 </file>
 
 <file path=ppt/slideLayouts/slideLayout6.xml><?xml version="1.0" encoding="utf-8"?>
-<p:sldLayout xmlns:a="http://schemas.openxmlformats.org/drawingml/2006/main" xmlns:r="http://schemas.openxmlformats.org/officeDocument/2006/relationships" xmlns:p14="http://schemas.microsoft.com/office/powerpoint/2010/main" xmlns:p15="http://schemas.microsoft.com/office/powerpoint/2012/main" xmlns:p="http://schemas.openxmlformats.org/presentationml/2006/main" type="titleOnly" preserve="1">
+<p:sldLayout xmlns:a="http://schemas.openxmlformats.org/drawingml/2006/main" xmlns:r="http://schemas.openxmlformats.org/officeDocument/2006/relationships" xmlns:m="http://schemas.openxmlformats.org/officeDocument/2006/math" xmlns:w="http://schemas.openxmlformats.org/wordprocessingml/2006/main" xmlns:wp="http://schemas.openxmlformats.org/drawingml/2006/wordprocessingDrawing" xmlns:a14="http://schemas.microsoft.com/office/drawing/2010/main" xmlns:mc="http://schemas.openxmlformats.org/markup-compatibility/2006" xmlns:p14="http://schemas.microsoft.com/office/powerpoint/2010/main" xmlns:p15="http://schemas.microsoft.com/office/powerpoint/2012/main" xmlns:p159="http://schemas.microsoft.com/office/powerpoint/2015/09/main" xmlns:p="http://schemas.openxmlformats.org/presentationml/2006/main" type="titleOnly" preserve="1">
   <p:cSld name="Title Only">
     <p:spTree>
       <p:nvGrpSpPr>
@@ -1728,7 +1722,7 @@
           <a:bodyPr/>
           <a:lstStyle/>
           <a:p>
-            <a:fld id="{56F66129-919E-492C-8A1B-F160C0207E30}" type="datetimeFigureOut">
+            <a:fld id="{F0DD9599-8BD2-4B3B-8219-CDC739818FEC}" type="datetimeFigureOut">
               <a:rPr lang="ru-RU" smtClean="0"/>
               <a:t>31.01.2017</a:t>
             </a:fld>
@@ -1770,7 +1764,7 @@
           <a:bodyPr/>
           <a:lstStyle/>
           <a:p>
-            <a:fld id="{AE5BA9BA-2214-46E9-AFA9-6DBBD522CB90}" type="slidenum">
+            <a:fld id="{85BAAAE6-A6EB-49A1-9055-EDD80F287142}" type="slidenum">
               <a:rPr lang="ru-RU" smtClean="0"/>
               <a:t>‹#›</a:t>
             </a:fld>
@@ -1781,7 +1775,7 @@
     </p:spTree>
     <p:extLst>
       <p:ext uri="{BB962C8B-B14F-4D97-AF65-F5344CB8AC3E}">
-        <p14:creationId xmlns:p14="http://schemas.microsoft.com/office/powerpoint/2010/main" val="1423978720"/>
+        <p14:creationId val="2198323959"/>
       </p:ext>
     </p:extLst>
   </p:cSld>
@@ -1794,7 +1788,7 @@
 </file>
 
 <file path=ppt/slideLayouts/slideLayout7.xml><?xml version="1.0" encoding="utf-8"?>
-<p:sldLayout xmlns:a="http://schemas.openxmlformats.org/drawingml/2006/main" xmlns:r="http://schemas.openxmlformats.org/officeDocument/2006/relationships" xmlns:p14="http://schemas.microsoft.com/office/powerpoint/2010/main" xmlns:p15="http://schemas.microsoft.com/office/powerpoint/2012/main" xmlns:p="http://schemas.openxmlformats.org/presentationml/2006/main" type="blank" preserve="1">
+<p:sldLayout xmlns:a="http://schemas.openxmlformats.org/drawingml/2006/main" xmlns:r="http://schemas.openxmlformats.org/officeDocument/2006/relationships" xmlns:m="http://schemas.openxmlformats.org/officeDocument/2006/math" xmlns:w="http://schemas.openxmlformats.org/wordprocessingml/2006/main" xmlns:wp="http://schemas.openxmlformats.org/drawingml/2006/wordprocessingDrawing" xmlns:a14="http://schemas.microsoft.com/office/drawing/2010/main" xmlns:mc="http://schemas.openxmlformats.org/markup-compatibility/2006" xmlns:p14="http://schemas.microsoft.com/office/powerpoint/2010/main" xmlns:p15="http://schemas.microsoft.com/office/powerpoint/2012/main" xmlns:p159="http://schemas.microsoft.com/office/powerpoint/2015/09/main" xmlns:p="http://schemas.openxmlformats.org/presentationml/2006/main" type="blank" preserve="1">
   <p:cSld name="Blank">
     <p:spTree>
       <p:nvGrpSpPr>
@@ -1823,7 +1817,7 @@
           <a:bodyPr/>
           <a:lstStyle/>
           <a:p>
-            <a:fld id="{56F66129-919E-492C-8A1B-F160C0207E30}" type="datetimeFigureOut">
+            <a:fld id="{F0DD9599-8BD2-4B3B-8219-CDC739818FEC}" type="datetimeFigureOut">
               <a:rPr lang="ru-RU" smtClean="0"/>
               <a:t>31.01.2017</a:t>
             </a:fld>
@@ -1865,7 +1859,7 @@
           <a:bodyPr/>
           <a:lstStyle/>
           <a:p>
-            <a:fld id="{AE5BA9BA-2214-46E9-AFA9-6DBBD522CB90}" type="slidenum">
+            <a:fld id="{85BAAAE6-A6EB-49A1-9055-EDD80F287142}" type="slidenum">
               <a:rPr lang="ru-RU" smtClean="0"/>
               <a:t>‹#›</a:t>
             </a:fld>
@@ -1876,7 +1870,7 @@
     </p:spTree>
     <p:extLst>
       <p:ext uri="{BB962C8B-B14F-4D97-AF65-F5344CB8AC3E}">
-        <p14:creationId xmlns:p14="http://schemas.microsoft.com/office/powerpoint/2010/main" val="2819177761"/>
+        <p14:creationId val="1627945591"/>
       </p:ext>
     </p:extLst>
   </p:cSld>
@@ -1889,7 +1883,7 @@
 </file>
 
 <file path=ppt/slideLayouts/slideLayout8.xml><?xml version="1.0" encoding="utf-8"?>
-<p:sldLayout xmlns:a="http://schemas.openxmlformats.org/drawingml/2006/main" xmlns:r="http://schemas.openxmlformats.org/officeDocument/2006/relationships" xmlns:p14="http://schemas.microsoft.com/office/powerpoint/2010/main" xmlns:p15="http://schemas.microsoft.com/office/powerpoint/2012/main" xmlns:p="http://schemas.openxmlformats.org/presentationml/2006/main" type="objTx" preserve="1">
+<p:sldLayout xmlns:a="http://schemas.openxmlformats.org/drawingml/2006/main" xmlns:r="http://schemas.openxmlformats.org/officeDocument/2006/relationships" xmlns:m="http://schemas.openxmlformats.org/officeDocument/2006/math" xmlns:w="http://schemas.openxmlformats.org/wordprocessingml/2006/main" xmlns:wp="http://schemas.openxmlformats.org/drawingml/2006/wordprocessingDrawing" xmlns:a14="http://schemas.microsoft.com/office/drawing/2010/main" xmlns:mc="http://schemas.openxmlformats.org/markup-compatibility/2006" xmlns:p14="http://schemas.microsoft.com/office/powerpoint/2010/main" xmlns:p15="http://schemas.microsoft.com/office/powerpoint/2012/main" xmlns:p159="http://schemas.microsoft.com/office/powerpoint/2015/09/main" xmlns:p="http://schemas.openxmlformats.org/presentationml/2006/main" type="objTx" preserve="1">
   <p:cSld name="Content with Caption">
     <p:spTree>
       <p:nvGrpSpPr>
@@ -2100,7 +2094,7 @@
           <a:bodyPr/>
           <a:lstStyle/>
           <a:p>
-            <a:fld id="{56F66129-919E-492C-8A1B-F160C0207E30}" type="datetimeFigureOut">
+            <a:fld id="{F0DD9599-8BD2-4B3B-8219-CDC739818FEC}" type="datetimeFigureOut">
               <a:rPr lang="ru-RU" smtClean="0"/>
               <a:t>31.01.2017</a:t>
             </a:fld>
@@ -2142,7 +2136,7 @@
           <a:bodyPr/>
           <a:lstStyle/>
           <a:p>
-            <a:fld id="{AE5BA9BA-2214-46E9-AFA9-6DBBD522CB90}" type="slidenum">
+            <a:fld id="{85BAAAE6-A6EB-49A1-9055-EDD80F287142}" type="slidenum">
               <a:rPr lang="ru-RU" smtClean="0"/>
               <a:t>‹#›</a:t>
             </a:fld>
@@ -2153,7 +2147,7 @@
     </p:spTree>
     <p:extLst>
       <p:ext uri="{BB962C8B-B14F-4D97-AF65-F5344CB8AC3E}">
-        <p14:creationId xmlns:p14="http://schemas.microsoft.com/office/powerpoint/2010/main" val="1958066189"/>
+        <p14:creationId val="3719105415"/>
       </p:ext>
     </p:extLst>
   </p:cSld>
@@ -2166,7 +2160,7 @@
 </file>
 
 <file path=ppt/slideLayouts/slideLayout9.xml><?xml version="1.0" encoding="utf-8"?>
-<p:sldLayout xmlns:a="http://schemas.openxmlformats.org/drawingml/2006/main" xmlns:r="http://schemas.openxmlformats.org/officeDocument/2006/relationships" xmlns:p14="http://schemas.microsoft.com/office/powerpoint/2010/main" xmlns:p15="http://schemas.microsoft.com/office/powerpoint/2012/main" xmlns:p="http://schemas.openxmlformats.org/presentationml/2006/main" type="picTx" preserve="1">
+<p:sldLayout xmlns:a="http://schemas.openxmlformats.org/drawingml/2006/main" xmlns:r="http://schemas.openxmlformats.org/officeDocument/2006/relationships" xmlns:m="http://schemas.openxmlformats.org/officeDocument/2006/math" xmlns:w="http://schemas.openxmlformats.org/wordprocessingml/2006/main" xmlns:wp="http://schemas.openxmlformats.org/drawingml/2006/wordprocessingDrawing" xmlns:a14="http://schemas.microsoft.com/office/drawing/2010/main" xmlns:mc="http://schemas.openxmlformats.org/markup-compatibility/2006" xmlns:p14="http://schemas.microsoft.com/office/powerpoint/2010/main" xmlns:p15="http://schemas.microsoft.com/office/powerpoint/2012/main" xmlns:p159="http://schemas.microsoft.com/office/powerpoint/2015/09/main" xmlns:p="http://schemas.openxmlformats.org/presentationml/2006/main" type="picTx" preserve="1">
   <p:cSld name="Picture with Caption">
     <p:spTree>
       <p:nvGrpSpPr>
@@ -2353,7 +2347,7 @@
           <a:bodyPr/>
           <a:lstStyle/>
           <a:p>
-            <a:fld id="{56F66129-919E-492C-8A1B-F160C0207E30}" type="datetimeFigureOut">
+            <a:fld id="{F0DD9599-8BD2-4B3B-8219-CDC739818FEC}" type="datetimeFigureOut">
               <a:rPr lang="ru-RU" smtClean="0"/>
               <a:t>31.01.2017</a:t>
             </a:fld>
@@ -2395,7 +2389,7 @@
           <a:bodyPr/>
           <a:lstStyle/>
           <a:p>
-            <a:fld id="{AE5BA9BA-2214-46E9-AFA9-6DBBD522CB90}" type="slidenum">
+            <a:fld id="{85BAAAE6-A6EB-49A1-9055-EDD80F287142}" type="slidenum">
               <a:rPr lang="ru-RU" smtClean="0"/>
               <a:t>‹#›</a:t>
             </a:fld>
@@ -2406,7 +2400,7 @@
     </p:spTree>
     <p:extLst>
       <p:ext uri="{BB962C8B-B14F-4D97-AF65-F5344CB8AC3E}">
-        <p14:creationId xmlns:p14="http://schemas.microsoft.com/office/powerpoint/2010/main" val="1143043476"/>
+        <p14:creationId val="1002766403"/>
       </p:ext>
     </p:extLst>
   </p:cSld>
@@ -2419,7 +2413,7 @@
 </file>
 
 <file path=ppt/slideMasters/slideMaster1.xml><?xml version="1.0" encoding="utf-8"?>
-<p:sldMaster xmlns:a="http://schemas.openxmlformats.org/drawingml/2006/main" xmlns:r="http://schemas.openxmlformats.org/officeDocument/2006/relationships" xmlns:p14="http://schemas.microsoft.com/office/powerpoint/2010/main" xmlns:p15="http://schemas.microsoft.com/office/powerpoint/2012/main" xmlns:p="http://schemas.openxmlformats.org/presentationml/2006/main">
+<p:sldMaster xmlns:a="http://schemas.openxmlformats.org/drawingml/2006/main" xmlns:r="http://schemas.openxmlformats.org/officeDocument/2006/relationships" xmlns:m="http://schemas.openxmlformats.org/officeDocument/2006/math" xmlns:w="http://schemas.openxmlformats.org/wordprocessingml/2006/main" xmlns:wp="http://schemas.openxmlformats.org/drawingml/2006/wordprocessingDrawing" xmlns:a14="http://schemas.microsoft.com/office/drawing/2010/main" xmlns:mc="http://schemas.openxmlformats.org/markup-compatibility/2006" xmlns:p14="http://schemas.microsoft.com/office/powerpoint/2010/main" xmlns:p15="http://schemas.microsoft.com/office/powerpoint/2012/main" xmlns:p159="http://schemas.microsoft.com/office/powerpoint/2015/09/main" xmlns:p="http://schemas.openxmlformats.org/presentationml/2006/main">
   <p:cSld>
     <p:bg>
       <p:bgRef idx="1001">
@@ -2566,7 +2560,7 @@
             </a:lvl1pPr>
           </a:lstStyle>
           <a:p>
-            <a:fld id="{56F66129-919E-492C-8A1B-F160C0207E30}" type="datetimeFigureOut">
+            <a:fld id="{F0DD9599-8BD2-4B3B-8219-CDC739818FEC}" type="datetimeFigureOut">
               <a:rPr lang="ru-RU" smtClean="0"/>
               <a:t>31.01.2017</a:t>
             </a:fld>
@@ -2644,7 +2638,7 @@
             </a:lvl1pPr>
           </a:lstStyle>
           <a:p>
-            <a:fld id="{AE5BA9BA-2214-46E9-AFA9-6DBBD522CB90}" type="slidenum">
+            <a:fld id="{85BAAAE6-A6EB-49A1-9055-EDD80F287142}" type="slidenum">
               <a:rPr lang="ru-RU" smtClean="0"/>
               <a:t>‹#›</a:t>
             </a:fld>
@@ -2655,7 +2649,7 @@
     </p:spTree>
     <p:extLst>
       <p:ext uri="{BB962C8B-B14F-4D97-AF65-F5344CB8AC3E}">
-        <p14:creationId xmlns:p14="http://schemas.microsoft.com/office/powerpoint/2010/main" val="2623157108"/>
+        <p14:creationId val="2240827916"/>
       </p:ext>
     </p:extLst>
   </p:cSld>
@@ -2959,8 +2953,8 @@
 </file>
 
 <file path=ppt/slides/slide1.xml><?xml version="1.0" encoding="utf-8"?>
-<p:sld xmlns:a="http://schemas.openxmlformats.org/drawingml/2006/main" xmlns:r="http://schemas.openxmlformats.org/officeDocument/2006/relationships" xmlns:p14="http://schemas.microsoft.com/office/powerpoint/2010/main" xmlns:p15="http://schemas.microsoft.com/office/powerpoint/2012/main" xmlns:p="http://schemas.openxmlformats.org/presentationml/2006/main">
-  <p:cSld>
+<p:sld xmlns:a="http://schemas.openxmlformats.org/drawingml/2006/main" xmlns:r="http://schemas.openxmlformats.org/officeDocument/2006/relationships" xmlns:m="http://schemas.openxmlformats.org/officeDocument/2006/math" xmlns:w="http://schemas.openxmlformats.org/wordprocessingml/2006/main" xmlns:wp="http://schemas.openxmlformats.org/drawingml/2006/wordprocessingDrawing" xmlns:a14="http://schemas.microsoft.com/office/drawing/2010/main" xmlns:mc="http://schemas.openxmlformats.org/markup-compatibility/2006" xmlns:p14="http://schemas.microsoft.com/office/powerpoint/2010/main" xmlns:p15="http://schemas.microsoft.com/office/powerpoint/2012/main" xmlns:p159="http://schemas.microsoft.com/office/powerpoint/2015/09/main" xmlns:p="http://schemas.openxmlformats.org/presentationml/2006/main">
+  <p:cSld name="">
     <p:spTree>
       <p:nvGrpSpPr>
         <p:cNvPr id="1" name=""/>
@@ -2990,7 +2984,7 @@
           <a:p>
             <a:r>
               <a:rPr lang="en-US" smtClean="0"/>
-              <a:t>Planets</a:t>
+              <a:t>Managers</a:t>
             </a:r>
             <a:endParaRPr lang="ru-RU"/>
           </a:p>
@@ -3006,14 +3000,14 @@
             <p:ph idx="1"/>
             <p:extLst>
               <p:ext uri="{D42A27DB-BD31-4B8C-83A1-F6EECF244321}">
-                <p14:modId xmlns:p14="http://schemas.microsoft.com/office/powerpoint/2010/main" val="4074141132"/>
+                <p14:modId val="1495386773"/>
               </p:ext>
             </p:extLst>
           </p:nvPr>
         </p:nvGraphicFramePr>
         <p:xfrm>
           <a:off x="838200" y="1825625"/>
-          <a:ext cx="10515600" cy="1112520"/>
+          <a:ext cx="10515600" cy="2595880"/>
         </p:xfrm>
         <a:graphic>
           <a:graphicData uri="http://schemas.openxmlformats.org/drawingml/2006/table">
@@ -3028,12 +3022,12 @@
               <a:tr h="370840">
                 <a:tc>
                   <a:txBody>
-                    <a:bodyPr/>
+                    <a:bodyPr vert="horz" wrap="square"/>
                     <a:lstStyle/>
                     <a:p>
                       <a:r>
                         <a:rPr lang="en-US" smtClean="0"/>
-                        <a:t>Planet</a:t>
+                        <a:t>Manager</a:t>
                       </a:r>
                       <a:endParaRPr lang="ru-RU"/>
                     </a:p>
@@ -3042,12 +3036,12 @@
                 </a:tc>
                 <a:tc>
                   <a:txBody>
-                    <a:bodyPr/>
+                    <a:bodyPr vert="horz" wrap="square"/>
                     <a:lstStyle/>
                     <a:p>
                       <a:r>
                         <a:rPr lang="en-US" smtClean="0"/>
-                        <a:t>Number</a:t>
+                        <a:t>Total Contract Price</a:t>
                       </a:r>
                       <a:endParaRPr lang="ru-RU"/>
                     </a:p>
@@ -3058,12 +3052,12 @@
               <a:tr h="370840">
                 <a:tc>
                   <a:txBody>
-                    <a:bodyPr/>
+                    <a:bodyPr vert="horz" wrap="square"/>
                     <a:lstStyle/>
                     <a:p>
                       <a:r>
                         <a:rPr lang="en-US" smtClean="0"/>
-                        <a:t>Earth</a:t>
+                        <a:t>John Smith</a:t>
                       </a:r>
                       <a:endParaRPr lang="ru-RU"/>
                     </a:p>
@@ -3072,12 +3066,12 @@
                 </a:tc>
                 <a:tc>
                   <a:txBody>
-                    <a:bodyPr/>
+                    <a:bodyPr vert="horz" wrap="square"/>
                     <a:lstStyle/>
                     <a:p>
                       <a:r>
                         <a:rPr lang="en-US" smtClean="0"/>
-                        <a:t>3</a:t>
+                        <a:t>2300000.0</a:t>
                       </a:r>
                       <a:endParaRPr lang="ru-RU"/>
                     </a:p>
@@ -3088,12 +3082,12 @@
               <a:tr h="370840">
                 <a:tc>
                   <a:txBody>
-                    <a:bodyPr/>
+                    <a:bodyPr vert="horz" wrap="square"/>
                     <a:lstStyle/>
                     <a:p>
                       <a:r>
                         <a:rPr lang="en-US" smtClean="0"/>
-                        <a:t>Mars</a:t>
+                        <a:t>Tony Anderson</a:t>
                       </a:r>
                       <a:endParaRPr lang="ru-RU"/>
                     </a:p>
@@ -3102,12 +3096,132 @@
                 </a:tc>
                 <a:tc>
                   <a:txBody>
-                    <a:bodyPr/>
+                    <a:bodyPr vert="horz" wrap="square"/>
                     <a:lstStyle/>
                     <a:p>
                       <a:r>
                         <a:rPr lang="en-US" smtClean="0"/>
-                        <a:t>4</a:t>
+                        <a:t>1200000.0</a:t>
+                      </a:r>
+                      <a:endParaRPr lang="ru-RU"/>
+                    </a:p>
+                  </a:txBody>
+                  <a:tcPr/>
+                </a:tc>
+              </a:tr>
+              <a:tr h="370840">
+                <a:tc>
+                  <a:txBody>
+                    <a:bodyPr vert="horz" wrap="square"/>
+                    <a:lstStyle/>
+                    <a:p>
+                      <a:r>
+                        <a:rPr lang="en-US" smtClean="0"/>
+                        <a:t>July James</a:t>
+                      </a:r>
+                      <a:endParaRPr lang="ru-RU"/>
+                    </a:p>
+                  </a:txBody>
+                  <a:tcPr/>
+                </a:tc>
+                <a:tc>
+                  <a:txBody>
+                    <a:bodyPr vert="horz" wrap="square"/>
+                    <a:lstStyle/>
+                    <a:p>
+                      <a:r>
+                        <a:rPr lang="en-US" smtClean="0"/>
+                        <a:t>800000.0</a:t>
+                      </a:r>
+                      <a:endParaRPr lang="ru-RU"/>
+                    </a:p>
+                  </a:txBody>
+                  <a:tcPr/>
+                </a:tc>
+              </a:tr>
+              <a:tr h="370840">
+                <a:tc>
+                  <a:txBody>
+                    <a:bodyPr vert="horz" wrap="square"/>
+                    <a:lstStyle/>
+                    <a:p>
+                      <a:r>
+                        <a:rPr lang="en-US" smtClean="0"/>
+                        <a:t>Sally Sue</a:t>
+                      </a:r>
+                      <a:endParaRPr lang="ru-RU"/>
+                    </a:p>
+                  </a:txBody>
+                  <a:tcPr/>
+                </a:tc>
+                <a:tc>
+                  <a:txBody>
+                    <a:bodyPr vert="horz" wrap="square"/>
+                    <a:lstStyle/>
+                    <a:p>
+                      <a:r>
+                        <a:rPr lang="en-US" smtClean="0"/>
+                        <a:t>750000.0</a:t>
+                      </a:r>
+                      <a:endParaRPr lang="ru-RU"/>
+                    </a:p>
+                  </a:txBody>
+                  <a:tcPr/>
+                </a:tc>
+              </a:tr>
+              <a:tr h="370840">
+                <a:tc>
+                  <a:txBody>
+                    <a:bodyPr vert="horz" wrap="square"/>
+                    <a:lstStyle/>
+                    <a:p>
+                      <a:r>
+                        <a:rPr lang="en-US" smtClean="0"/>
+                        <a:t>Mike Gonzalez</a:t>
+                      </a:r>
+                      <a:endParaRPr lang="ru-RU"/>
+                    </a:p>
+                  </a:txBody>
+                  <a:tcPr/>
+                </a:tc>
+                <a:tc>
+                  <a:txBody>
+                    <a:bodyPr vert="horz" wrap="square"/>
+                    <a:lstStyle/>
+                    <a:p>
+                      <a:r>
+                        <a:rPr lang="en-US" smtClean="0"/>
+                        <a:t>650000.0</a:t>
+                      </a:r>
+                      <a:endParaRPr lang="ru-RU"/>
+                    </a:p>
+                  </a:txBody>
+                  <a:tcPr/>
+                </a:tc>
+              </a:tr>
+              <a:tr h="370840">
+                <a:tc>
+                  <a:txBody>
+                    <a:bodyPr vert="horz" wrap="square"/>
+                    <a:lstStyle/>
+                    <a:p>
+                      <a:r>
+                        <a:rPr lang="en-US" smtClean="0"/>
+                        <a:t>Total:</a:t>
+                      </a:r>
+                      <a:endParaRPr lang="ru-RU"/>
+                    </a:p>
+                  </a:txBody>
+                  <a:tcPr/>
+                </a:tc>
+                <a:tc>
+                  <a:txBody>
+                    <a:bodyPr vert="horz" wrap="square"/>
+                    <a:lstStyle/>
+                    <a:p>
+                      <a:r>
+                        <a:rPr lang="en-US" smtClean="0"/>
+                        <a:t>5700000.0</a:t>
                       </a:r>
                       <a:endParaRPr lang="ru-RU"/>
                     </a:p>
@@ -3122,389 +3236,7 @@
     </p:spTree>
     <p:extLst>
       <p:ext uri="{BB962C8B-B14F-4D97-AF65-F5344CB8AC3E}">
-        <p14:creationId xmlns:p14="http://schemas.microsoft.com/office/powerpoint/2010/main" val="4283038382"/>
-      </p:ext>
-    </p:extLst>
-  </p:cSld>
-  <p:clrMapOvr>
-    <a:masterClrMapping/>
-  </p:clrMapOvr>
-  <p:transition/>
-  <p:timing/>
-</p:sld>
-</file>
-
-<file path=ppt/slides/slide2.xml><?xml version="1.0" encoding="utf-8"?>
-<p:sld xmlns:a="http://schemas.openxmlformats.org/drawingml/2006/main" xmlns:r="http://schemas.openxmlformats.org/officeDocument/2006/relationships" xmlns:p14="http://schemas.microsoft.com/office/powerpoint/2010/main" xmlns:p15="http://schemas.microsoft.com/office/powerpoint/2012/main" xmlns:p="http://schemas.openxmlformats.org/presentationml/2006/main">
-  <p:cSld>
-    <p:spTree>
-      <p:nvGrpSpPr>
-        <p:cNvPr id="1" name=""/>
-        <p:cNvGrpSpPr/>
-        <p:nvPr/>
-      </p:nvGrpSpPr>
-      <p:grpSpPr>
-        <a:xfrm>
-          <a:off x="0" y="0"/>
-          <a:ext cx="0" cy="0"/>
-        </a:xfrm>
-      </p:grpSpPr>
-      <p:sp>
-        <p:nvSpPr>
-          <p:cNvPr id="2" name="Title 1"/>
-          <p:cNvSpPr>
-            <a:spLocks noGrp="1"/>
-          </p:cNvSpPr>
-          <p:nvPr>
-            <p:ph type="title"/>
-          </p:nvPr>
-        </p:nvSpPr>
-        <p:spPr/>
-        <p:txBody>
-          <a:bodyPr/>
-          <a:lstStyle/>
-          <a:p>
-            <a:r>
-              <a:rPr lang="en-US" smtClean="0"/>
-              <a:t>Persons</a:t>
-            </a:r>
-            <a:endParaRPr lang="ru-RU"/>
-          </a:p>
-        </p:txBody>
-      </p:sp>
-      <p:graphicFrame>
-        <p:nvGraphicFramePr>
-          <p:cNvPr id="4" name="Content Placeholder 3"/>
-          <p:cNvGraphicFramePr>
-            <a:graphicFrameLocks noGrp="1"/>
-          </p:cNvGraphicFramePr>
-          <p:nvPr>
-            <p:ph idx="1"/>
-            <p:extLst>
-              <p:ext uri="{D42A27DB-BD31-4B8C-83A1-F6EECF244321}">
-                <p14:modId xmlns:p14="http://schemas.microsoft.com/office/powerpoint/2010/main" val="3324645714"/>
-              </p:ext>
-            </p:extLst>
-          </p:nvPr>
-        </p:nvGraphicFramePr>
-        <p:xfrm>
-          <a:off x="838200" y="1825625"/>
-          <a:ext cx="10515600" cy="1483360"/>
-        </p:xfrm>
-        <a:graphic>
-          <a:graphicData uri="http://schemas.openxmlformats.org/drawingml/2006/table">
-            <a:tbl>
-              <a:tblPr firstRow="1" bandRow="1">
-                <a:tableStyleId>{5C22544A-7EE6-4342-B048-85BDC9FD1C3A}</a:tableStyleId>
-              </a:tblPr>
-              <a:tblGrid>
-                <a:gridCol w="5257800"/>
-                <a:gridCol w="5257800"/>
-              </a:tblGrid>
-              <a:tr h="370840">
-                <a:tc>
-                  <a:txBody>
-                    <a:bodyPr/>
-                    <a:lstStyle/>
-                    <a:p>
-                      <a:r>
-                        <a:rPr lang="en-US" smtClean="0"/>
-                        <a:t>First Name</a:t>
-                      </a:r>
-                      <a:endParaRPr lang="ru-RU"/>
-                    </a:p>
-                  </a:txBody>
-                  <a:tcPr/>
-                </a:tc>
-                <a:tc>
-                  <a:txBody>
-                    <a:bodyPr/>
-                    <a:lstStyle/>
-                    <a:p>
-                      <a:r>
-                        <a:rPr lang="en-US" smtClean="0"/>
-                        <a:t>Last Name</a:t>
-                      </a:r>
-                      <a:endParaRPr lang="ru-RU"/>
-                    </a:p>
-                  </a:txBody>
-                  <a:tcPr/>
-                </a:tc>
-              </a:tr>
-              <a:tr h="370840">
-                <a:tc>
-                  <a:txBody>
-                    <a:bodyPr/>
-                    <a:lstStyle/>
-                    <a:p>
-                      <a:r>
-                        <a:rPr lang="en-US" smtClean="0"/>
-                        <a:t>John</a:t>
-                      </a:r>
-                      <a:endParaRPr lang="ru-RU"/>
-                    </a:p>
-                  </a:txBody>
-                  <a:tcPr/>
-                </a:tc>
-                <a:tc>
-                  <a:txBody>
-                    <a:bodyPr/>
-                    <a:lstStyle/>
-                    <a:p>
-                      <a:r>
-                        <a:rPr lang="en-US" smtClean="0"/>
-                        <a:t>Doe</a:t>
-                      </a:r>
-                      <a:endParaRPr lang="ru-RU"/>
-                    </a:p>
-                  </a:txBody>
-                  <a:tcPr/>
-                </a:tc>
-              </a:tr>
-              <a:tr h="370840">
-                <a:tc>
-                  <a:txBody>
-                    <a:bodyPr/>
-                    <a:lstStyle/>
-                    <a:p>
-                      <a:r>
-                        <a:rPr lang="en-US" smtClean="0"/>
-                        <a:t>Jane</a:t>
-                      </a:r>
-                      <a:endParaRPr lang="ru-RU"/>
-                    </a:p>
-                  </a:txBody>
-                  <a:tcPr/>
-                </a:tc>
-                <a:tc>
-                  <a:txBody>
-                    <a:bodyPr/>
-                    <a:lstStyle/>
-                    <a:p>
-                      <a:r>
-                        <a:rPr lang="en-US" smtClean="0"/>
-                        <a:t>Doe</a:t>
-                      </a:r>
-                      <a:endParaRPr lang="ru-RU"/>
-                    </a:p>
-                  </a:txBody>
-                  <a:tcPr/>
-                </a:tc>
-              </a:tr>
-              <a:tr h="370840">
-                <a:tc>
-                  <a:txBody>
-                    <a:bodyPr/>
-                    <a:lstStyle/>
-                    <a:p>
-                      <a:r>
-                        <a:rPr lang="en-US" smtClean="0"/>
-                        <a:t>John</a:t>
-                      </a:r>
-                      <a:endParaRPr lang="ru-RU"/>
-                    </a:p>
-                  </a:txBody>
-                  <a:tcPr/>
-                </a:tc>
-                <a:tc>
-                  <a:txBody>
-                    <a:bodyPr/>
-                    <a:lstStyle/>
-                    <a:p>
-                      <a:r>
-                        <a:rPr lang="en-US" smtClean="0"/>
-                        <a:t>Smith</a:t>
-                      </a:r>
-                      <a:endParaRPr lang="ru-RU"/>
-                    </a:p>
-                  </a:txBody>
-                  <a:tcPr/>
-                </a:tc>
-              </a:tr>
-            </a:tbl>
-          </a:graphicData>
-        </a:graphic>
-      </p:graphicFrame>
-    </p:spTree>
-    <p:extLst>
-      <p:ext uri="{BB962C8B-B14F-4D97-AF65-F5344CB8AC3E}">
-        <p14:creationId xmlns:p14="http://schemas.microsoft.com/office/powerpoint/2010/main" val="1879868098"/>
-      </p:ext>
-    </p:extLst>
-  </p:cSld>
-  <p:clrMapOvr>
-    <a:masterClrMapping/>
-  </p:clrMapOvr>
-  <p:transition/>
-  <p:timing/>
-</p:sld>
-</file>
-
-<file path=ppt/slides/slide3.xml><?xml version="1.0" encoding="utf-8"?>
-<p:sld xmlns:a="http://schemas.openxmlformats.org/drawingml/2006/main" xmlns:r="http://schemas.openxmlformats.org/officeDocument/2006/relationships" xmlns:p14="http://schemas.microsoft.com/office/powerpoint/2010/main" xmlns:p15="http://schemas.microsoft.com/office/powerpoint/2012/main" xmlns:p="http://schemas.openxmlformats.org/presentationml/2006/main">
-  <p:cSld>
-    <p:spTree>
-      <p:nvGrpSpPr>
-        <p:cNvPr id="1" name=""/>
-        <p:cNvGrpSpPr/>
-        <p:nvPr/>
-      </p:nvGrpSpPr>
-      <p:grpSpPr>
-        <a:xfrm>
-          <a:off x="0" y="0"/>
-          <a:ext cx="0" cy="0"/>
-        </a:xfrm>
-      </p:grpSpPr>
-      <p:sp>
-        <p:nvSpPr>
-          <p:cNvPr id="2" name="Title 1"/>
-          <p:cNvSpPr>
-            <a:spLocks noGrp="1"/>
-          </p:cNvSpPr>
-          <p:nvPr>
-            <p:ph type="title"/>
-          </p:nvPr>
-        </p:nvSpPr>
-        <p:spPr/>
-        <p:txBody>
-          <a:bodyPr/>
-          <a:lstStyle/>
-          <a:p>
-            <a:r>
-              <a:rPr lang="en-US" smtClean="0"/>
-              <a:t>Companies</a:t>
-            </a:r>
-            <a:endParaRPr lang="ru-RU"/>
-          </a:p>
-        </p:txBody>
-      </p:sp>
-      <p:graphicFrame>
-        <p:nvGraphicFramePr>
-          <p:cNvPr id="4" name="Content Placeholder 3"/>
-          <p:cNvGraphicFramePr>
-            <a:graphicFrameLocks noGrp="1"/>
-          </p:cNvGraphicFramePr>
-          <p:nvPr>
-            <p:ph idx="1"/>
-            <p:extLst>
-              <p:ext uri="{D42A27DB-BD31-4B8C-83A1-F6EECF244321}">
-                <p14:modId xmlns:p14="http://schemas.microsoft.com/office/powerpoint/2010/main" val="4252013662"/>
-              </p:ext>
-            </p:extLst>
-          </p:nvPr>
-        </p:nvGraphicFramePr>
-        <p:xfrm>
-          <a:off x="838200" y="1825625"/>
-          <a:ext cx="10515600" cy="1112520"/>
-        </p:xfrm>
-        <a:graphic>
-          <a:graphicData uri="http://schemas.openxmlformats.org/drawingml/2006/table">
-            <a:tbl>
-              <a:tblPr firstRow="1" bandRow="1">
-                <a:tableStyleId>{5C22544A-7EE6-4342-B048-85BDC9FD1C3A}</a:tableStyleId>
-              </a:tblPr>
-              <a:tblGrid>
-                <a:gridCol w="5257800"/>
-                <a:gridCol w="5257800"/>
-              </a:tblGrid>
-              <a:tr h="370840">
-                <a:tc>
-                  <a:txBody>
-                    <a:bodyPr/>
-                    <a:lstStyle/>
-                    <a:p>
-                      <a:r>
-                        <a:rPr lang="en-US" smtClean="0"/>
-                        <a:t>Company</a:t>
-                      </a:r>
-                      <a:endParaRPr lang="ru-RU"/>
-                    </a:p>
-                  </a:txBody>
-                  <a:tcPr/>
-                </a:tc>
-                <a:tc>
-                  <a:txBody>
-                    <a:bodyPr/>
-                    <a:lstStyle/>
-                    <a:p>
-                      <a:r>
-                        <a:rPr lang="en-US" smtClean="0"/>
-                        <a:t>Address</a:t>
-                      </a:r>
-                      <a:endParaRPr lang="ru-RU"/>
-                    </a:p>
-                  </a:txBody>
-                  <a:tcPr/>
-                </a:tc>
-              </a:tr>
-              <a:tr h="370840">
-                <a:tc>
-                  <a:txBody>
-                    <a:bodyPr/>
-                    <a:lstStyle/>
-                    <a:p>
-                      <a:r>
-                        <a:rPr lang="en-US" smtClean="0"/>
-                        <a:t>A Company</a:t>
-                      </a:r>
-                      <a:endParaRPr lang="ru-RU"/>
-                    </a:p>
-                  </a:txBody>
-                  <a:tcPr/>
-                </a:tc>
-                <a:tc>
-                  <a:txBody>
-                    <a:bodyPr/>
-                    <a:lstStyle/>
-                    <a:p>
-                      <a:r>
-                        <a:rPr lang="en-US" smtClean="0"/>
-                        <a:t>Address A</a:t>
-                      </a:r>
-                      <a:endParaRPr lang="ru-RU"/>
-                    </a:p>
-                  </a:txBody>
-                  <a:tcPr/>
-                </a:tc>
-              </a:tr>
-              <a:tr h="370840">
-                <a:tc>
-                  <a:txBody>
-                    <a:bodyPr/>
-                    <a:lstStyle/>
-                    <a:p>
-                      <a:r>
-                        <a:rPr lang="en-US" smtClean="0"/>
-                        <a:t>B Ltd.</a:t>
-                      </a:r>
-                      <a:endParaRPr lang="ru-RU"/>
-                    </a:p>
-                  </a:txBody>
-                  <a:tcPr/>
-                </a:tc>
-                <a:tc>
-                  <a:txBody>
-                    <a:bodyPr/>
-                    <a:lstStyle/>
-                    <a:p>
-                      <a:r>
-                        <a:rPr lang="en-US" smtClean="0"/>
-                        <a:t>Address B</a:t>
-                      </a:r>
-                      <a:endParaRPr lang="ru-RU"/>
-                    </a:p>
-                  </a:txBody>
-                  <a:tcPr/>
-                </a:tc>
-              </a:tr>
-            </a:tbl>
-          </a:graphicData>
-        </a:graphic>
-      </p:graphicFrame>
-    </p:spTree>
-    <p:extLst>
-      <p:ext uri="{BB962C8B-B14F-4D97-AF65-F5344CB8AC3E}">
-        <p14:creationId xmlns:p14="http://schemas.microsoft.com/office/powerpoint/2010/main" val="601769983"/>
+        <p14:creationId val="915137232"/>
       </p:ext>
     </p:extLst>
   </p:cSld>
@@ -3518,10 +3250,10 @@
 
 <file path=ppt/tags/tag1.xml><?xml version="1.0" encoding="utf-8"?>
 <p:tagLst xmlns:p="http://schemas.openxmlformats.org/presentationml/2006/main">
-  <p:tag name="AS_OS" val="Microsoft Windows NT 6.3"/>
-  <p:tag name="AS_RELEASE_DATE" val="2016.06.11"/>
+  <p:tag name="AS_OS" val="Microsoft Windows NT 10.0"/>
+  <p:tag name="AS_RELEASE_DATE" val="2026.02.28"/>
   <p:tag name="AS_TITLE" val="Aspose.Slides for Java"/>
-  <p:tag name="AS_VERSION" val="16.5.0.0"/>
+  <p:tag name="AS_VERSION" val="26.2"/>
 </p:tagLst>
 </file>
 
@@ -3533,7 +3265,7 @@
         <a:sysClr val="windowText" lastClr="000000"/>
       </a:dk1>
       <a:lt1>
-        <a:sysClr val="window" lastClr="FFFEFF"/>
+        <a:sysClr val="window" lastClr="FFFFFF"/>
       </a:lt1>
       <a:dk2>
         <a:srgbClr val="44546A"/>
@@ -3569,7 +3301,7 @@
     <a:fontScheme name="Office">
       <a:majorFont>
         <a:latin typeface="Calibri Light" panose="020f0302020204030204"/>
-        <a:ea typeface="Arial"/>
+        <a:ea typeface="Calibri Light" panose="020f0302020204030204"/>
         <a:cs typeface="Arial"/>
         <a:font script="Jpan" typeface="ＭＳ Ｐゴシック"/>
         <a:font script="Hang" typeface="맑은 고딕"/>
@@ -3604,7 +3336,7 @@
       </a:majorFont>
       <a:minorFont>
         <a:latin typeface="Calibri" panose="020f0502020204030204"/>
-        <a:ea typeface="Arial"/>
+        <a:ea typeface="Calibri" panose="020f0502020204030204"/>
         <a:cs typeface="Arial"/>
         <a:font script="Jpan" typeface="ＭＳ Ｐゴシック"/>
         <a:font script="Hang" typeface="맑은 고딕"/>
@@ -3668,7 +3400,6 @@
             </a:gs>
           </a:gsLst>
           <a:lin ang="5400000" scaled="0"/>
-          <a:tileRect/>
         </a:gradFill>
         <a:gradFill rotWithShape="1">
           <a:gsLst>
@@ -3695,7 +3426,6 @@
             </a:gs>
           </a:gsLst>
           <a:lin ang="5400000" scaled="0"/>
-          <a:tileRect/>
         </a:gradFill>
       </a:fillStyleLst>
       <a:lnStyleLst>
@@ -3774,7 +3504,6 @@
             </a:gs>
           </a:gsLst>
           <a:lin ang="5400000" scaled="0"/>
-          <a:tileRect/>
         </a:gradFill>
       </a:bgFillStyleLst>
     </a:fmtScheme>
